--- a/SUNUM_Challenge11.pptx
+++ b/SUNUM_Challenge11.pptx
@@ -5,7 +5,7 @@
     <p:sldMasterId id="2147483648" r:id="rId1"/>
   </p:sldMasterIdLst>
   <p:notesMasterIdLst>
-    <p:notesMasterId r:id="rId20"/>
+    <p:notesMasterId r:id="rId19"/>
   </p:notesMasterIdLst>
   <p:sldIdLst>
     <p:sldId id="256" r:id="rId2"/>
@@ -23,9 +23,8 @@
     <p:sldId id="267" r:id="rId14"/>
     <p:sldId id="268" r:id="rId15"/>
     <p:sldId id="269" r:id="rId16"/>
-    <p:sldId id="270" r:id="rId17"/>
-    <p:sldId id="271" r:id="rId18"/>
-    <p:sldId id="272" r:id="rId19"/>
+    <p:sldId id="271" r:id="rId17"/>
+    <p:sldId id="272" r:id="rId18"/>
   </p:sldIdLst>
   <p:sldSz cx="12192000" cy="6858000"/>
   <p:notesSz cx="6858000" cy="9144000"/>
@@ -745,74 +744,6 @@
 </file>
 
 <file path=ppt/notesSlides/notesSlide16.xml><?xml version="1.0" encoding="utf-8"?>
-<p:notes xmlns:a="http://schemas.openxmlformats.org/drawingml/2006/main" xmlns:r="http://schemas.openxmlformats.org/officeDocument/2006/relationships" xmlns:p="http://schemas.openxmlformats.org/presentationml/2006/main">
-  <p:cSld>
-    <p:spTree>
-      <p:nvGrpSpPr>
-        <p:cNvPr id="1" name=""/>
-        <p:cNvGrpSpPr/>
-        <p:nvPr/>
-      </p:nvGrpSpPr>
-      <p:grpSpPr>
-        <a:xfrm>
-          <a:off x="0" y="0"/>
-          <a:ext cx="0" cy="0"/>
-          <a:chOff x="0" y="0"/>
-          <a:chExt cx="0" cy="0"/>
-        </a:xfrm>
-      </p:grpSpPr>
-      <p:sp>
-        <p:nvSpPr>
-          <p:cNvPr id="2" name="Slide Image Placeholder 1"/>
-          <p:cNvSpPr>
-            <a:spLocks noGrp="1" noRot="1" noChangeAspect="1"/>
-          </p:cNvSpPr>
-          <p:nvPr>
-            <p:ph type="sldImg" idx="2"/>
-          </p:nvPr>
-        </p:nvSpPr>
-        <p:spPr/>
-      </p:sp>
-      <p:sp>
-        <p:nvSpPr>
-          <p:cNvPr id="3" name="Notes Placeholder 2"/>
-          <p:cNvSpPr>
-            <a:spLocks noGrp="1"/>
-          </p:cNvSpPr>
-          <p:nvPr>
-            <p:ph type="body" sz="quarter" idx="3"/>
-          </p:nvPr>
-        </p:nvSpPr>
-        <p:spPr/>
-        <p:txBody>
-          <a:bodyPr/>
-          <a:lstStyle/>
-          <a:p>
-            <a:endParaRPr dirty="0"/>
-          </a:p>
-        </p:txBody>
-      </p:sp>
-      <p:sp>
-        <p:nvSpPr>
-          <p:cNvPr id="4" name="Slide Number Placeholder 3"/>
-          <p:cNvSpPr>
-            <a:spLocks noGrp="1"/>
-          </p:cNvSpPr>
-          <p:nvPr>
-            <p:ph type="sldNum" sz="quarter" idx="5"/>
-          </p:nvPr>
-        </p:nvSpPr>
-        <p:spPr/>
-      </p:sp>
-    </p:spTree>
-  </p:cSld>
-  <p:clrMapOvr>
-    <a:masterClrMapping/>
-  </p:clrMapOvr>
-</p:notes>
-</file>
-
-<file path=ppt/notesSlides/notesSlide17.xml><?xml version="1.0" encoding="utf-8"?>
 <p:notes xmlns:a="http://schemas.openxmlformats.org/drawingml/2006/main" xmlns:r="http://schemas.openxmlformats.org/officeDocument/2006/relationships" xmlns:p="http://schemas.openxmlformats.org/presentationml/2006/main">
   <p:cSld>
     <p:spTree>
@@ -4990,7 +4921,7 @@
         <p:spPr>
           <a:xfrm>
             <a:off x="640080" y="1554480"/>
-            <a:ext cx="10515600" cy="2195473"/>
+            <a:ext cx="10515600" cy="2780248"/>
           </a:xfrm>
           <a:prstGeom prst="rect">
             <a:avLst/>
@@ -5079,11 +5010,6 @@
             </a:r>
           </a:p>
           <a:p>
-            <a:pPr>
-              <a:spcAft>
-                <a:spcPts val="1200"/>
-              </a:spcAft>
-            </a:pPr>
             <a:r>
               <a:rPr sz="2000" dirty="0">
                 <a:solidFill>
@@ -5094,45 +5020,18 @@
               <a:t>• </a:t>
             </a:r>
             <a:r>
-              <a:rPr lang="tr-TR" sz="2000" dirty="0">
+              <a:rPr lang="tr-TR" dirty="0">
                 <a:solidFill>
                   <a:schemeClr val="bg1"/>
                 </a:solidFill>
               </a:rPr>
-              <a:t>Test senaryosu: ANKARA-DB01 → 2 uygulama + </a:t>
-            </a:r>
-            <a:r>
-              <a:rPr lang="tr-TR" sz="2000" dirty="0" err="1">
-                <a:solidFill>
-                  <a:schemeClr val="bg1"/>
-                </a:solidFill>
-              </a:rPr>
-              <a:t>frontend</a:t>
-            </a:r>
-            <a:r>
-              <a:rPr lang="tr-TR" sz="2000" dirty="0">
-                <a:solidFill>
-                  <a:schemeClr val="bg1"/>
-                </a:solidFill>
-              </a:rPr>
-              <a:t> (+ keşif </a:t>
-            </a:r>
-            <a:r>
-              <a:rPr lang="tr-TR" sz="2000" dirty="0" err="1">
-                <a:solidFill>
-                  <a:schemeClr val="bg1"/>
-                </a:solidFill>
-              </a:rPr>
-              <a:t>CI’ları</a:t>
-            </a:r>
-            <a:r>
-              <a:rPr lang="tr-TR" sz="2000" dirty="0">
-                <a:solidFill>
-                  <a:schemeClr val="bg1"/>
-                </a:solidFill>
-              </a:rPr>
-              <a:t>) = 3 etkilenen.</a:t>
-            </a:r>
+              <a:t>Test senaryosu: ANKARA-DB01 çökerse → APP-ORDER, APP-BILLING ve FRONTEND-WEB etkilenir (toplam 3).</a:t>
+            </a:r>
+          </a:p>
+          <a:p>
+            <a:br>
+              <a:rPr lang="tr-TR" dirty="0"/>
+            </a:br>
             <a:endParaRPr sz="2000" dirty="0">
               <a:solidFill>
                 <a:schemeClr val="bg1"/>
@@ -6927,7 +6826,7 @@
                 </a:solidFill>
                 <a:latin typeface="Calibri"/>
               </a:rPr>
-              <a:t>DOĞRULAMA</a:t>
+              <a:t>DEĞERLENDİRME</a:t>
             </a:r>
           </a:p>
         </p:txBody>
@@ -6960,7 +6859,7 @@
                   <a:srgbClr val="F5F7F6"/>
                 </a:solidFill>
               </a:rPr>
-              <a:t>Kalite ve Kontrol Sonuçları</a:t>
+              <a:t>Kapsam ve Gerçek Ürünlerle İlişki</a:t>
             </a:r>
           </a:p>
         </p:txBody>
@@ -6974,7 +6873,7 @@
         <p:spPr>
           <a:xfrm>
             <a:off x="640080" y="1554480"/>
-            <a:ext cx="10515600" cy="4389120"/>
+            <a:ext cx="10515600" cy="2246769"/>
           </a:xfrm>
           <a:prstGeom prst="rect">
             <a:avLst/>
@@ -6993,13 +6892,13 @@
               </a:spcAft>
             </a:pPr>
             <a:r>
-              <a:rPr sz="2000" b="0">
-                <a:solidFill>
-                  <a:srgbClr val="E8F0EC"/>
-                </a:solidFill>
-                <a:latin typeface="Calibri"/>
-              </a:rPr>
-              <a:t>•  Veri modeli: ilişkiler tutarlı biçimde okunabiliyor</a:t>
+              <a:rPr sz="2000" b="0" dirty="0">
+                <a:solidFill>
+                  <a:srgbClr val="E8F0EC"/>
+                </a:solidFill>
+                <a:latin typeface="Calibri"/>
+              </a:rPr>
+              <a:t>•  Çözüm, CMDB’nin temel değerini gösterir: ilişki + etki analizi.</a:t>
             </a:r>
           </a:p>
           <a:p>
@@ -7009,13 +6908,13 @@
               </a:spcAft>
             </a:pPr>
             <a:r>
-              <a:rPr sz="2000" b="0">
-                <a:solidFill>
-                  <a:srgbClr val="E8F0EC"/>
-                </a:solidFill>
-                <a:latin typeface="Calibri"/>
-              </a:rPr>
-              <a:t>•  API: envanter ve ilişki işlemleri Swagger üzerinden doğrulandı</a:t>
+              <a:rPr sz="2000" b="0" dirty="0">
+                <a:solidFill>
+                  <a:srgbClr val="E8F0EC"/>
+                </a:solidFill>
+                <a:latin typeface="Calibri"/>
+              </a:rPr>
+              <a:t>•  Üretim CMDB’leriyle aynı çekirdek mantığı paylaşır: keşif, graf, etki.</a:t>
             </a:r>
           </a:p>
           <a:p>
@@ -7025,13 +6924,13 @@
               </a:spcAft>
             </a:pPr>
             <a:r>
-              <a:rPr sz="2000" b="0">
-                <a:solidFill>
-                  <a:srgbClr val="E8F0EC"/>
-                </a:solidFill>
-                <a:latin typeface="Calibri"/>
-              </a:rPr>
-              <a:t>•  Discovery: yeterli CI üretimi; tekrar koşuda mükerrer artış yok</a:t>
+              <a:rPr sz="2000" b="0" dirty="0">
+                <a:solidFill>
+                  <a:srgbClr val="E8F0EC"/>
+                </a:solidFill>
+                <a:latin typeface="Calibri"/>
+              </a:rPr>
+              <a:t>•  Kapsam bilinçli olarak eğitim ölçeğindedir: sade model, odaklı yetenekler.</a:t>
             </a:r>
           </a:p>
           <a:p>
@@ -7041,13 +6940,13 @@
               </a:spcAft>
             </a:pPr>
             <a:r>
-              <a:rPr sz="2000" b="0">
-                <a:solidFill>
-                  <a:srgbClr val="E8F0EC"/>
-                </a:solidFill>
-                <a:latin typeface="Calibri"/>
-              </a:rPr>
-              <a:t>•  Etki analizi: zincir senaryosu beklenen sonucu veriyor; döngü kontrolü çalışıyor</a:t>
+              <a:rPr sz="2000" b="0" dirty="0">
+                <a:solidFill>
+                  <a:srgbClr val="E8F0EC"/>
+                </a:solidFill>
+                <a:latin typeface="Calibri"/>
+              </a:rPr>
+              <a:t>•  Gerçek ürünlerde ek olarak federasyon, reconciliation ve change/incident entegrasyonu bulunur.</a:t>
             </a:r>
           </a:p>
           <a:p>
@@ -7057,29 +6956,31 @@
               </a:spcAft>
             </a:pPr>
             <a:r>
-              <a:rPr sz="2000" b="0">
-                <a:solidFill>
-                  <a:srgbClr val="E8F0EC"/>
-                </a:solidFill>
-                <a:latin typeface="Calibri"/>
-              </a:rPr>
-              <a:t>•  Arayüz: teknik bilgi olmadan çökme etkisi okunabiliyor</a:t>
-            </a:r>
-          </a:p>
-          <a:p>
-            <a:pPr algn="l">
-              <a:spcAft>
-                <a:spcPts val="1200"/>
-              </a:spcAft>
-            </a:pPr>
-            <a:r>
-              <a:rPr sz="2000" b="0">
-                <a:solidFill>
-                  <a:srgbClr val="E8F0EC"/>
-                </a:solidFill>
-                <a:latin typeface="Calibri"/>
-              </a:rPr>
-              <a:t>•  Otomatik testler: başarıyla tamamlandı</a:t>
+              <a:rPr sz="2000" b="0" dirty="0">
+                <a:solidFill>
+                  <a:srgbClr val="E8F0EC"/>
+                </a:solidFill>
+                <a:latin typeface="Calibri"/>
+              </a:rPr>
+              <a:t>•  Bu çalışma, </a:t>
+            </a:r>
+            <a:r>
+              <a:rPr sz="2000" b="0" dirty="0" err="1">
+                <a:solidFill>
+                  <a:srgbClr val="E8F0EC"/>
+                </a:solidFill>
+                <a:latin typeface="Calibri"/>
+              </a:rPr>
+              <a:t>iş</a:t>
+            </a:r>
+            <a:r>
+              <a:rPr sz="2000" b="0" dirty="0">
+                <a:solidFill>
+                  <a:srgbClr val="E8F0EC"/>
+                </a:solidFill>
+                <a:latin typeface="Calibri"/>
+              </a:rPr>
+              <a:t> alanındaki temel mimariyi uygulamalı olarak kanıtlar.</a:t>
             </a:r>
           </a:p>
         </p:txBody>
@@ -7155,264 +7056,6 @@
       </p:sp>
       <p:sp>
         <p:nvSpPr>
-          <p:cNvPr id="4" name="TextBox 3"/>
-          <p:cNvSpPr txBox="1"/>
-          <p:nvPr/>
-        </p:nvSpPr>
-        <p:spPr>
-          <a:xfrm>
-            <a:off x="640080" y="320040"/>
-            <a:ext cx="10515600" cy="320040"/>
-          </a:xfrm>
-          <a:prstGeom prst="rect">
-            <a:avLst/>
-          </a:prstGeom>
-          <a:noFill/>
-        </p:spPr>
-        <p:txBody>
-          <a:bodyPr wrap="square">
-            <a:spAutoFit/>
-          </a:bodyPr>
-          <a:lstStyle/>
-          <a:p>
-            <a:pPr algn="l"/>
-            <a:r>
-              <a:rPr sz="1400" b="1">
-                <a:solidFill>
-                  <a:srgbClr val="2EA86A"/>
-                </a:solidFill>
-                <a:latin typeface="Calibri"/>
-              </a:rPr>
-              <a:t>DEĞERLENDİRME</a:t>
-            </a:r>
-          </a:p>
-        </p:txBody>
-      </p:sp>
-      <p:sp>
-        <p:nvSpPr>
-          <p:cNvPr id="5" name="TextBox 4"/>
-          <p:cNvSpPr txBox="1"/>
-          <p:nvPr/>
-        </p:nvSpPr>
-        <p:spPr>
-          <a:xfrm>
-            <a:off x="640080" y="685800"/>
-            <a:ext cx="10515600" cy="584775"/>
-          </a:xfrm>
-          <a:prstGeom prst="rect">
-            <a:avLst/>
-          </a:prstGeom>
-          <a:noFill/>
-        </p:spPr>
-        <p:txBody>
-          <a:bodyPr wrap="square">
-            <a:spAutoFit/>
-          </a:bodyPr>
-          <a:lstStyle/>
-          <a:p>
-            <a:r>
-              <a:rPr lang="tr-TR" sz="3200" b="1" dirty="0">
-                <a:solidFill>
-                  <a:srgbClr val="F5F7F6"/>
-                </a:solidFill>
-              </a:rPr>
-              <a:t>Kapsam ve Gerçek Ürünlerle İlişki</a:t>
-            </a:r>
-          </a:p>
-        </p:txBody>
-      </p:sp>
-      <p:sp>
-        <p:nvSpPr>
-          <p:cNvPr id="6" name="TextBox 5"/>
-          <p:cNvSpPr txBox="1"/>
-          <p:nvPr/>
-        </p:nvSpPr>
-        <p:spPr>
-          <a:xfrm>
-            <a:off x="640080" y="1554480"/>
-            <a:ext cx="10515600" cy="2246769"/>
-          </a:xfrm>
-          <a:prstGeom prst="rect">
-            <a:avLst/>
-          </a:prstGeom>
-          <a:noFill/>
-        </p:spPr>
-        <p:txBody>
-          <a:bodyPr wrap="square">
-            <a:spAutoFit/>
-          </a:bodyPr>
-          <a:lstStyle/>
-          <a:p>
-            <a:pPr algn="l">
-              <a:spcAft>
-                <a:spcPts val="1200"/>
-              </a:spcAft>
-            </a:pPr>
-            <a:r>
-              <a:rPr sz="2000" b="0" dirty="0">
-                <a:solidFill>
-                  <a:srgbClr val="E8F0EC"/>
-                </a:solidFill>
-                <a:latin typeface="Calibri"/>
-              </a:rPr>
-              <a:t>•  Çözüm, CMDB’nin temel değerini gösterir: ilişki + etki analizi.</a:t>
-            </a:r>
-          </a:p>
-          <a:p>
-            <a:pPr algn="l">
-              <a:spcAft>
-                <a:spcPts val="1200"/>
-              </a:spcAft>
-            </a:pPr>
-            <a:r>
-              <a:rPr sz="2000" b="0" dirty="0">
-                <a:solidFill>
-                  <a:srgbClr val="E8F0EC"/>
-                </a:solidFill>
-                <a:latin typeface="Calibri"/>
-              </a:rPr>
-              <a:t>•  Üretim CMDB’leriyle aynı çekirdek mantığı paylaşır: keşif, graf, etki.</a:t>
-            </a:r>
-          </a:p>
-          <a:p>
-            <a:pPr algn="l">
-              <a:spcAft>
-                <a:spcPts val="1200"/>
-              </a:spcAft>
-            </a:pPr>
-            <a:r>
-              <a:rPr sz="2000" b="0" dirty="0">
-                <a:solidFill>
-                  <a:srgbClr val="E8F0EC"/>
-                </a:solidFill>
-                <a:latin typeface="Calibri"/>
-              </a:rPr>
-              <a:t>•  Kapsam bilinçli olarak eğitim ölçeğindedir: sade model, odaklı yetenekler.</a:t>
-            </a:r>
-          </a:p>
-          <a:p>
-            <a:pPr algn="l">
-              <a:spcAft>
-                <a:spcPts val="1200"/>
-              </a:spcAft>
-            </a:pPr>
-            <a:r>
-              <a:rPr sz="2000" b="0" dirty="0">
-                <a:solidFill>
-                  <a:srgbClr val="E8F0EC"/>
-                </a:solidFill>
-                <a:latin typeface="Calibri"/>
-              </a:rPr>
-              <a:t>•  Gerçek ürünlerde ek olarak federasyon, reconciliation ve change/incident entegrasyonu bulunur.</a:t>
-            </a:r>
-          </a:p>
-          <a:p>
-            <a:pPr algn="l">
-              <a:spcAft>
-                <a:spcPts val="1200"/>
-              </a:spcAft>
-            </a:pPr>
-            <a:r>
-              <a:rPr sz="2000" b="0" dirty="0">
-                <a:solidFill>
-                  <a:srgbClr val="E8F0EC"/>
-                </a:solidFill>
-                <a:latin typeface="Calibri"/>
-              </a:rPr>
-              <a:t>•  Bu çalışma, </a:t>
-            </a:r>
-            <a:r>
-              <a:rPr sz="2000" b="0" dirty="0" err="1">
-                <a:solidFill>
-                  <a:srgbClr val="E8F0EC"/>
-                </a:solidFill>
-                <a:latin typeface="Calibri"/>
-              </a:rPr>
-              <a:t>iş</a:t>
-            </a:r>
-            <a:r>
-              <a:rPr sz="2000" b="0" dirty="0">
-                <a:solidFill>
-                  <a:srgbClr val="E8F0EC"/>
-                </a:solidFill>
-                <a:latin typeface="Calibri"/>
-              </a:rPr>
-              <a:t> alanındaki temel mimariyi uygulamalı olarak kanıtlar.</a:t>
-            </a:r>
-          </a:p>
-        </p:txBody>
-      </p:sp>
-    </p:spTree>
-  </p:cSld>
-  <p:clrMapOvr>
-    <a:masterClrMapping/>
-  </p:clrMapOvr>
-</p:sld>
-</file>
-
-<file path=ppt/slides/slide18.xml><?xml version="1.0" encoding="utf-8"?>
-<p:sld xmlns:a="http://schemas.openxmlformats.org/drawingml/2006/main" xmlns:r="http://schemas.openxmlformats.org/officeDocument/2006/relationships" xmlns:p="http://schemas.openxmlformats.org/presentationml/2006/main">
-  <p:cSld>
-    <p:spTree>
-      <p:nvGrpSpPr>
-        <p:cNvPr id="1" name=""/>
-        <p:cNvGrpSpPr/>
-        <p:nvPr/>
-      </p:nvGrpSpPr>
-      <p:grpSpPr>
-        <a:xfrm>
-          <a:off x="0" y="0"/>
-          <a:ext cx="0" cy="0"/>
-          <a:chOff x="0" y="0"/>
-          <a:chExt cx="0" cy="0"/>
-        </a:xfrm>
-      </p:grpSpPr>
-      <p:sp>
-        <p:nvSpPr>
-          <p:cNvPr id="2" name="Rectangle 1"/>
-          <p:cNvSpPr/>
-          <p:nvPr/>
-        </p:nvSpPr>
-        <p:spPr>
-          <a:xfrm>
-            <a:off x="0" y="0"/>
-            <a:ext cx="12191695" cy="6858000"/>
-          </a:xfrm>
-          <a:prstGeom prst="rect">
-            <a:avLst/>
-          </a:prstGeom>
-          <a:solidFill>
-            <a:srgbClr val="0B1C18"/>
-          </a:solidFill>
-          <a:ln>
-            <a:noFill/>
-          </a:ln>
-        </p:spPr>
-        <p:style>
-          <a:lnRef idx="1">
-            <a:schemeClr val="accent1"/>
-          </a:lnRef>
-          <a:fillRef idx="3">
-            <a:schemeClr val="accent1"/>
-          </a:fillRef>
-          <a:effectRef idx="2">
-            <a:schemeClr val="accent1"/>
-          </a:effectRef>
-          <a:fontRef idx="minor">
-            <a:schemeClr val="lt1"/>
-          </a:fontRef>
-        </p:style>
-        <p:txBody>
-          <a:bodyPr rtlCol="0" anchor="ctr"/>
-          <a:lstStyle/>
-          <a:p>
-            <a:pPr algn="ctr"/>
-            <a:endParaRPr/>
-          </a:p>
-        </p:txBody>
-      </p:sp>
-      <p:sp>
-        <p:nvSpPr>
           <p:cNvPr id="5" name="TextBox 4"/>
           <p:cNvSpPr txBox="1"/>
           <p:nvPr/>
@@ -7700,7 +7343,7 @@
         <p:spPr>
           <a:xfrm>
             <a:off x="640080" y="1554480"/>
-            <a:ext cx="10515600" cy="4389120"/>
+            <a:ext cx="10515600" cy="3170099"/>
           </a:xfrm>
           <a:prstGeom prst="rect">
             <a:avLst/>
@@ -7719,13 +7362,85 @@
               </a:spcAft>
             </a:pPr>
             <a:r>
-              <a:rPr sz="2000" b="0">
-                <a:solidFill>
-                  <a:srgbClr val="E8F0EC"/>
-                </a:solidFill>
-                <a:latin typeface="Calibri"/>
-              </a:rPr>
-              <a:t>•  1. Problem: Neden bir CMDB’ye ihtiyaç var?</a:t>
+              <a:rPr sz="2000" b="0" dirty="0">
+                <a:solidFill>
+                  <a:srgbClr val="E8F0EC"/>
+                </a:solidFill>
+                <a:latin typeface="Calibri"/>
+              </a:rPr>
+              <a:t>•  1. Problem: </a:t>
+            </a:r>
+            <a:r>
+              <a:rPr sz="2000" b="0" dirty="0" err="1">
+                <a:solidFill>
+                  <a:srgbClr val="E8F0EC"/>
+                </a:solidFill>
+                <a:latin typeface="Calibri"/>
+              </a:rPr>
+              <a:t>Neden</a:t>
+            </a:r>
+            <a:r>
+              <a:rPr sz="2000" b="0" dirty="0">
+                <a:solidFill>
+                  <a:srgbClr val="E8F0EC"/>
+                </a:solidFill>
+                <a:latin typeface="Calibri"/>
+              </a:rPr>
+              <a:t> </a:t>
+            </a:r>
+            <a:r>
+              <a:rPr sz="2000" b="0" dirty="0" err="1">
+                <a:solidFill>
+                  <a:srgbClr val="E8F0EC"/>
+                </a:solidFill>
+                <a:latin typeface="Calibri"/>
+              </a:rPr>
+              <a:t>bir</a:t>
+            </a:r>
+            <a:r>
+              <a:rPr sz="2000" b="0" dirty="0">
+                <a:solidFill>
+                  <a:srgbClr val="E8F0EC"/>
+                </a:solidFill>
+                <a:latin typeface="Calibri"/>
+              </a:rPr>
+              <a:t> </a:t>
+            </a:r>
+            <a:r>
+              <a:rPr sz="2000" b="0" dirty="0" err="1">
+                <a:solidFill>
+                  <a:srgbClr val="E8F0EC"/>
+                </a:solidFill>
+                <a:latin typeface="Calibri"/>
+              </a:rPr>
+              <a:t>CMDB’ye</a:t>
+            </a:r>
+            <a:r>
+              <a:rPr sz="2000" b="0" dirty="0">
+                <a:solidFill>
+                  <a:srgbClr val="E8F0EC"/>
+                </a:solidFill>
+                <a:latin typeface="Calibri"/>
+              </a:rPr>
+              <a:t> </a:t>
+            </a:r>
+            <a:r>
+              <a:rPr sz="2000" b="0" dirty="0" err="1">
+                <a:solidFill>
+                  <a:srgbClr val="E8F0EC"/>
+                </a:solidFill>
+                <a:latin typeface="Calibri"/>
+              </a:rPr>
+              <a:t>ihtiyaç</a:t>
+            </a:r>
+            <a:r>
+              <a:rPr sz="2000" b="0" dirty="0">
+                <a:solidFill>
+                  <a:srgbClr val="E8F0EC"/>
+                </a:solidFill>
+                <a:latin typeface="Calibri"/>
+              </a:rPr>
+              <a:t> var?</a:t>
             </a:r>
           </a:p>
           <a:p>
@@ -7735,13 +7450,139 @@
               </a:spcAft>
             </a:pPr>
             <a:r>
-              <a:rPr sz="2000" b="0">
-                <a:solidFill>
-                  <a:srgbClr val="E8F0EC"/>
-                </a:solidFill>
-                <a:latin typeface="Calibri"/>
-              </a:rPr>
-              <a:t>•  2. Adım 1 — Veritabanı: CI’lar ve ilişkiler nasıl modellendi?</a:t>
+              <a:rPr sz="2000" b="0" dirty="0">
+                <a:solidFill>
+                  <a:srgbClr val="E8F0EC"/>
+                </a:solidFill>
+                <a:latin typeface="Calibri"/>
+              </a:rPr>
+              <a:t>•  2. </a:t>
+            </a:r>
+            <a:r>
+              <a:rPr sz="2000" b="0" dirty="0" err="1">
+                <a:solidFill>
+                  <a:srgbClr val="E8F0EC"/>
+                </a:solidFill>
+                <a:latin typeface="Calibri"/>
+              </a:rPr>
+              <a:t>Adım</a:t>
+            </a:r>
+            <a:r>
+              <a:rPr sz="2000" b="0" dirty="0">
+                <a:solidFill>
+                  <a:srgbClr val="E8F0EC"/>
+                </a:solidFill>
+                <a:latin typeface="Calibri"/>
+              </a:rPr>
+              <a:t> 1 — </a:t>
+            </a:r>
+            <a:r>
+              <a:rPr sz="2000" b="0" dirty="0" err="1">
+                <a:solidFill>
+                  <a:srgbClr val="E8F0EC"/>
+                </a:solidFill>
+                <a:latin typeface="Calibri"/>
+              </a:rPr>
+              <a:t>Veritabanı</a:t>
+            </a:r>
+            <a:r>
+              <a:rPr sz="2000" b="0" dirty="0">
+                <a:solidFill>
+                  <a:srgbClr val="E8F0EC"/>
+                </a:solidFill>
+                <a:latin typeface="Calibri"/>
+              </a:rPr>
+              <a:t>: </a:t>
+            </a:r>
+            <a:r>
+              <a:rPr sz="2000" b="0" dirty="0" err="1">
+                <a:solidFill>
+                  <a:srgbClr val="E8F0EC"/>
+                </a:solidFill>
+                <a:latin typeface="Calibri"/>
+              </a:rPr>
+              <a:t>CI’lar</a:t>
+            </a:r>
+            <a:r>
+              <a:rPr sz="2000" b="0" dirty="0">
+                <a:solidFill>
+                  <a:srgbClr val="E8F0EC"/>
+                </a:solidFill>
+                <a:latin typeface="Calibri"/>
+              </a:rPr>
+              <a:t> </a:t>
+            </a:r>
+            <a:r>
+              <a:rPr sz="2000" b="0" dirty="0" err="1">
+                <a:solidFill>
+                  <a:srgbClr val="E8F0EC"/>
+                </a:solidFill>
+                <a:latin typeface="Calibri"/>
+              </a:rPr>
+              <a:t>ve</a:t>
+            </a:r>
+            <a:r>
+              <a:rPr sz="2000" b="0" dirty="0">
+                <a:solidFill>
+                  <a:srgbClr val="E8F0EC"/>
+                </a:solidFill>
+                <a:latin typeface="Calibri"/>
+              </a:rPr>
+              <a:t> </a:t>
+            </a:r>
+            <a:r>
+              <a:rPr sz="2000" b="0" dirty="0" err="1">
+                <a:solidFill>
+                  <a:srgbClr val="E8F0EC"/>
+                </a:solidFill>
+                <a:latin typeface="Calibri"/>
+              </a:rPr>
+              <a:t>ilişkiler</a:t>
+            </a:r>
+            <a:r>
+              <a:rPr sz="2000" b="0" dirty="0">
+                <a:solidFill>
+                  <a:srgbClr val="E8F0EC"/>
+                </a:solidFill>
+                <a:latin typeface="Calibri"/>
+              </a:rPr>
+              <a:t> </a:t>
+            </a:r>
+            <a:r>
+              <a:rPr sz="2000" b="0" dirty="0" err="1">
+                <a:solidFill>
+                  <a:srgbClr val="E8F0EC"/>
+                </a:solidFill>
+                <a:latin typeface="Calibri"/>
+              </a:rPr>
+              <a:t>nasıl</a:t>
+            </a:r>
+            <a:r>
+              <a:rPr sz="2000" b="0" dirty="0">
+                <a:solidFill>
+                  <a:srgbClr val="E8F0EC"/>
+                </a:solidFill>
+                <a:latin typeface="Calibri"/>
+              </a:rPr>
+              <a:t> </a:t>
+            </a:r>
+            <a:r>
+              <a:rPr sz="2000" b="0" dirty="0" err="1">
+                <a:solidFill>
+                  <a:srgbClr val="E8F0EC"/>
+                </a:solidFill>
+                <a:latin typeface="Calibri"/>
+              </a:rPr>
+              <a:t>modellendi</a:t>
+            </a:r>
+            <a:r>
+              <a:rPr sz="2000" b="0" dirty="0">
+                <a:solidFill>
+                  <a:srgbClr val="E8F0EC"/>
+                </a:solidFill>
+                <a:latin typeface="Calibri"/>
+              </a:rPr>
+              <a:t>?</a:t>
             </a:r>
           </a:p>
           <a:p>
@@ -7751,13 +7592,85 @@
               </a:spcAft>
             </a:pPr>
             <a:r>
-              <a:rPr sz="2000" b="0">
-                <a:solidFill>
-                  <a:srgbClr val="E8F0EC"/>
-                </a:solidFill>
-                <a:latin typeface="Calibri"/>
-              </a:rPr>
-              <a:t>•  3. Adım 2 — API: Veriye nasıl erişiliyor?</a:t>
+              <a:rPr sz="2000" b="0" dirty="0">
+                <a:solidFill>
+                  <a:srgbClr val="E8F0EC"/>
+                </a:solidFill>
+                <a:latin typeface="Calibri"/>
+              </a:rPr>
+              <a:t>•  3. </a:t>
+            </a:r>
+            <a:r>
+              <a:rPr sz="2000" b="0" dirty="0" err="1">
+                <a:solidFill>
+                  <a:srgbClr val="E8F0EC"/>
+                </a:solidFill>
+                <a:latin typeface="Calibri"/>
+              </a:rPr>
+              <a:t>Adım</a:t>
+            </a:r>
+            <a:r>
+              <a:rPr sz="2000" b="0" dirty="0">
+                <a:solidFill>
+                  <a:srgbClr val="E8F0EC"/>
+                </a:solidFill>
+                <a:latin typeface="Calibri"/>
+              </a:rPr>
+              <a:t> 2 — API: </a:t>
+            </a:r>
+            <a:r>
+              <a:rPr sz="2000" b="0" dirty="0" err="1">
+                <a:solidFill>
+                  <a:srgbClr val="E8F0EC"/>
+                </a:solidFill>
+                <a:latin typeface="Calibri"/>
+              </a:rPr>
+              <a:t>Veriye</a:t>
+            </a:r>
+            <a:r>
+              <a:rPr sz="2000" b="0" dirty="0">
+                <a:solidFill>
+                  <a:srgbClr val="E8F0EC"/>
+                </a:solidFill>
+                <a:latin typeface="Calibri"/>
+              </a:rPr>
+              <a:t> </a:t>
+            </a:r>
+            <a:r>
+              <a:rPr sz="2000" b="0" dirty="0" err="1">
+                <a:solidFill>
+                  <a:srgbClr val="E8F0EC"/>
+                </a:solidFill>
+                <a:latin typeface="Calibri"/>
+              </a:rPr>
+              <a:t>nasıl</a:t>
+            </a:r>
+            <a:r>
+              <a:rPr sz="2000" b="0" dirty="0">
+                <a:solidFill>
+                  <a:srgbClr val="E8F0EC"/>
+                </a:solidFill>
+                <a:latin typeface="Calibri"/>
+              </a:rPr>
+              <a:t> </a:t>
+            </a:r>
+            <a:r>
+              <a:rPr sz="2000" b="0" dirty="0" err="1">
+                <a:solidFill>
+                  <a:srgbClr val="E8F0EC"/>
+                </a:solidFill>
+                <a:latin typeface="Calibri"/>
+              </a:rPr>
+              <a:t>erişiliyor</a:t>
+            </a:r>
+            <a:r>
+              <a:rPr sz="2000" b="0" dirty="0">
+                <a:solidFill>
+                  <a:srgbClr val="E8F0EC"/>
+                </a:solidFill>
+                <a:latin typeface="Calibri"/>
+              </a:rPr>
+              <a:t>?</a:t>
             </a:r>
           </a:p>
           <a:p>
@@ -7767,13 +7680,103 @@
               </a:spcAft>
             </a:pPr>
             <a:r>
-              <a:rPr sz="2000" b="0">
-                <a:solidFill>
-                  <a:srgbClr val="E8F0EC"/>
-                </a:solidFill>
-                <a:latin typeface="Calibri"/>
-              </a:rPr>
-              <a:t>•  4. Adım 3 — Discovery: Envanter nasıl otomatik dolduruluyor?</a:t>
+              <a:rPr sz="2000" b="0" dirty="0">
+                <a:solidFill>
+                  <a:srgbClr val="E8F0EC"/>
+                </a:solidFill>
+                <a:latin typeface="Calibri"/>
+              </a:rPr>
+              <a:t>•  4. </a:t>
+            </a:r>
+            <a:r>
+              <a:rPr sz="2000" b="0" dirty="0" err="1">
+                <a:solidFill>
+                  <a:srgbClr val="E8F0EC"/>
+                </a:solidFill>
+                <a:latin typeface="Calibri"/>
+              </a:rPr>
+              <a:t>Adım</a:t>
+            </a:r>
+            <a:r>
+              <a:rPr sz="2000" b="0" dirty="0">
+                <a:solidFill>
+                  <a:srgbClr val="E8F0EC"/>
+                </a:solidFill>
+                <a:latin typeface="Calibri"/>
+              </a:rPr>
+              <a:t> 3 — Discovery: </a:t>
+            </a:r>
+            <a:r>
+              <a:rPr sz="2000" b="0" dirty="0" err="1">
+                <a:solidFill>
+                  <a:srgbClr val="E8F0EC"/>
+                </a:solidFill>
+                <a:latin typeface="Calibri"/>
+              </a:rPr>
+              <a:t>Envanter</a:t>
+            </a:r>
+            <a:r>
+              <a:rPr sz="2000" b="0" dirty="0">
+                <a:solidFill>
+                  <a:srgbClr val="E8F0EC"/>
+                </a:solidFill>
+                <a:latin typeface="Calibri"/>
+              </a:rPr>
+              <a:t> </a:t>
+            </a:r>
+            <a:r>
+              <a:rPr sz="2000" b="0" dirty="0" err="1">
+                <a:solidFill>
+                  <a:srgbClr val="E8F0EC"/>
+                </a:solidFill>
+                <a:latin typeface="Calibri"/>
+              </a:rPr>
+              <a:t>nasıl</a:t>
+            </a:r>
+            <a:r>
+              <a:rPr sz="2000" b="0" dirty="0">
+                <a:solidFill>
+                  <a:srgbClr val="E8F0EC"/>
+                </a:solidFill>
+                <a:latin typeface="Calibri"/>
+              </a:rPr>
+              <a:t> </a:t>
+            </a:r>
+            <a:r>
+              <a:rPr sz="2000" b="0" dirty="0" err="1">
+                <a:solidFill>
+                  <a:srgbClr val="E8F0EC"/>
+                </a:solidFill>
+                <a:latin typeface="Calibri"/>
+              </a:rPr>
+              <a:t>otomatik</a:t>
+            </a:r>
+            <a:r>
+              <a:rPr sz="2000" b="0" dirty="0">
+                <a:solidFill>
+                  <a:srgbClr val="E8F0EC"/>
+                </a:solidFill>
+                <a:latin typeface="Calibri"/>
+              </a:rPr>
+              <a:t> </a:t>
+            </a:r>
+            <a:r>
+              <a:rPr sz="2000" b="0" dirty="0" err="1">
+                <a:solidFill>
+                  <a:srgbClr val="E8F0EC"/>
+                </a:solidFill>
+                <a:latin typeface="Calibri"/>
+              </a:rPr>
+              <a:t>dolduruluyor</a:t>
+            </a:r>
+            <a:r>
+              <a:rPr sz="2000" b="0" dirty="0">
+                <a:solidFill>
+                  <a:srgbClr val="E8F0EC"/>
+                </a:solidFill>
+                <a:latin typeface="Calibri"/>
+              </a:rPr>
+              <a:t>?</a:t>
             </a:r>
           </a:p>
           <a:p>
@@ -7783,13 +7786,175 @@
               </a:spcAft>
             </a:pPr>
             <a:r>
-              <a:rPr sz="2000" b="0">
-                <a:solidFill>
-                  <a:srgbClr val="E8F0EC"/>
-                </a:solidFill>
-                <a:latin typeface="Calibri"/>
-              </a:rPr>
-              <a:t>•  5. Adım 4 — Etki analizi: Ters BFS ile çökme etkisi nasıl hesaplanıyor?</a:t>
+              <a:rPr sz="2000" b="0" dirty="0">
+                <a:solidFill>
+                  <a:srgbClr val="E8F0EC"/>
+                </a:solidFill>
+                <a:latin typeface="Calibri"/>
+              </a:rPr>
+              <a:t>•  5. </a:t>
+            </a:r>
+            <a:r>
+              <a:rPr sz="2000" b="0" dirty="0" err="1">
+                <a:solidFill>
+                  <a:srgbClr val="E8F0EC"/>
+                </a:solidFill>
+                <a:latin typeface="Calibri"/>
+              </a:rPr>
+              <a:t>Adım</a:t>
+            </a:r>
+            <a:r>
+              <a:rPr sz="2000" b="0" dirty="0">
+                <a:solidFill>
+                  <a:srgbClr val="E8F0EC"/>
+                </a:solidFill>
+                <a:latin typeface="Calibri"/>
+              </a:rPr>
+              <a:t> 4 — </a:t>
+            </a:r>
+            <a:r>
+              <a:rPr sz="2000" b="0" dirty="0" err="1">
+                <a:solidFill>
+                  <a:srgbClr val="E8F0EC"/>
+                </a:solidFill>
+                <a:latin typeface="Calibri"/>
+              </a:rPr>
+              <a:t>Etki</a:t>
+            </a:r>
+            <a:r>
+              <a:rPr sz="2000" b="0" dirty="0">
+                <a:solidFill>
+                  <a:srgbClr val="E8F0EC"/>
+                </a:solidFill>
+                <a:latin typeface="Calibri"/>
+              </a:rPr>
+              <a:t> </a:t>
+            </a:r>
+            <a:r>
+              <a:rPr sz="2000" b="0" dirty="0" err="1">
+                <a:solidFill>
+                  <a:srgbClr val="E8F0EC"/>
+                </a:solidFill>
+                <a:latin typeface="Calibri"/>
+              </a:rPr>
+              <a:t>analizi</a:t>
+            </a:r>
+            <a:r>
+              <a:rPr sz="2000" b="0" dirty="0">
+                <a:solidFill>
+                  <a:srgbClr val="E8F0EC"/>
+                </a:solidFill>
+                <a:latin typeface="Calibri"/>
+              </a:rPr>
+              <a:t>: </a:t>
+            </a:r>
+            <a:r>
+              <a:rPr sz="2000" b="0" dirty="0" err="1">
+                <a:solidFill>
+                  <a:srgbClr val="E8F0EC"/>
+                </a:solidFill>
+                <a:latin typeface="Calibri"/>
+              </a:rPr>
+              <a:t>Ters</a:t>
+            </a:r>
+            <a:r>
+              <a:rPr sz="2000" b="0" dirty="0">
+                <a:solidFill>
+                  <a:srgbClr val="E8F0EC"/>
+                </a:solidFill>
+                <a:latin typeface="Calibri"/>
+              </a:rPr>
+              <a:t> BFS </a:t>
+            </a:r>
+            <a:r>
+              <a:rPr sz="2000" b="0" dirty="0" err="1">
+                <a:solidFill>
+                  <a:srgbClr val="E8F0EC"/>
+                </a:solidFill>
+                <a:latin typeface="Calibri"/>
+              </a:rPr>
+              <a:t>ile</a:t>
+            </a:r>
+            <a:r>
+              <a:rPr sz="2000" b="0" dirty="0">
+                <a:solidFill>
+                  <a:srgbClr val="E8F0EC"/>
+                </a:solidFill>
+                <a:latin typeface="Calibri"/>
+              </a:rPr>
+              <a:t> </a:t>
+            </a:r>
+            <a:r>
+              <a:rPr sz="2000" b="0" dirty="0" err="1">
+                <a:solidFill>
+                  <a:srgbClr val="E8F0EC"/>
+                </a:solidFill>
+                <a:latin typeface="Calibri"/>
+              </a:rPr>
+              <a:t>çökme</a:t>
+            </a:r>
+            <a:r>
+              <a:rPr sz="2000" b="0" dirty="0">
+                <a:solidFill>
+                  <a:srgbClr val="E8F0EC"/>
+                </a:solidFill>
+                <a:latin typeface="Calibri"/>
+              </a:rPr>
+              <a:t> </a:t>
+            </a:r>
+            <a:r>
+              <a:rPr sz="2000" b="0" dirty="0" err="1">
+                <a:solidFill>
+                  <a:srgbClr val="E8F0EC"/>
+                </a:solidFill>
+                <a:latin typeface="Calibri"/>
+              </a:rPr>
+              <a:t>etkisi</a:t>
+            </a:r>
+            <a:r>
+              <a:rPr sz="2000" b="0" dirty="0">
+                <a:solidFill>
+                  <a:srgbClr val="E8F0EC"/>
+                </a:solidFill>
+                <a:latin typeface="Calibri"/>
+              </a:rPr>
+              <a:t> </a:t>
+            </a:r>
+            <a:r>
+              <a:rPr sz="2000" b="0" dirty="0" err="1">
+                <a:solidFill>
+                  <a:srgbClr val="E8F0EC"/>
+                </a:solidFill>
+                <a:latin typeface="Calibri"/>
+              </a:rPr>
+              <a:t>nasıl</a:t>
+            </a:r>
+            <a:r>
+              <a:rPr sz="2000" b="0" dirty="0">
+                <a:solidFill>
+                  <a:srgbClr val="E8F0EC"/>
+                </a:solidFill>
+                <a:latin typeface="Calibri"/>
+              </a:rPr>
+              <a:t> </a:t>
+            </a:r>
+            <a:r>
+              <a:rPr sz="2000" b="0" dirty="0" err="1">
+                <a:solidFill>
+                  <a:srgbClr val="E8F0EC"/>
+                </a:solidFill>
+                <a:latin typeface="Calibri"/>
+              </a:rPr>
+              <a:t>hesaplanıyor</a:t>
+            </a:r>
+            <a:r>
+              <a:rPr sz="2000" b="0" dirty="0">
+                <a:solidFill>
+                  <a:srgbClr val="E8F0EC"/>
+                </a:solidFill>
+                <a:latin typeface="Calibri"/>
+              </a:rPr>
+              <a:t>?</a:t>
             </a:r>
           </a:p>
           <a:p>
@@ -7799,13 +7964,85 @@
               </a:spcAft>
             </a:pPr>
             <a:r>
-              <a:rPr sz="2000" b="0">
-                <a:solidFill>
-                  <a:srgbClr val="E8F0EC"/>
-                </a:solidFill>
-                <a:latin typeface="Calibri"/>
-              </a:rPr>
-              <a:t>•  6. Adım 5 — Arayüz: Streamlit + CLI canlı demo</a:t>
+              <a:rPr sz="2000" b="0" dirty="0">
+                <a:solidFill>
+                  <a:srgbClr val="E8F0EC"/>
+                </a:solidFill>
+                <a:latin typeface="Calibri"/>
+              </a:rPr>
+              <a:t>•  6. </a:t>
+            </a:r>
+            <a:r>
+              <a:rPr sz="2000" b="0" dirty="0" err="1">
+                <a:solidFill>
+                  <a:srgbClr val="E8F0EC"/>
+                </a:solidFill>
+                <a:latin typeface="Calibri"/>
+              </a:rPr>
+              <a:t>Adım</a:t>
+            </a:r>
+            <a:r>
+              <a:rPr sz="2000" b="0" dirty="0">
+                <a:solidFill>
+                  <a:srgbClr val="E8F0EC"/>
+                </a:solidFill>
+                <a:latin typeface="Calibri"/>
+              </a:rPr>
+              <a:t> 5 — </a:t>
+            </a:r>
+            <a:r>
+              <a:rPr sz="2000" b="0" dirty="0" err="1">
+                <a:solidFill>
+                  <a:srgbClr val="E8F0EC"/>
+                </a:solidFill>
+                <a:latin typeface="Calibri"/>
+              </a:rPr>
+              <a:t>Arayüz</a:t>
+            </a:r>
+            <a:r>
+              <a:rPr sz="2000" b="0" dirty="0">
+                <a:solidFill>
+                  <a:srgbClr val="E8F0EC"/>
+                </a:solidFill>
+                <a:latin typeface="Calibri"/>
+              </a:rPr>
+              <a:t>: </a:t>
+            </a:r>
+            <a:r>
+              <a:rPr sz="2000" b="0" dirty="0" err="1">
+                <a:solidFill>
+                  <a:srgbClr val="E8F0EC"/>
+                </a:solidFill>
+                <a:latin typeface="Calibri"/>
+              </a:rPr>
+              <a:t>Streamlit</a:t>
+            </a:r>
+            <a:r>
+              <a:rPr sz="2000" b="0" dirty="0">
+                <a:solidFill>
+                  <a:srgbClr val="E8F0EC"/>
+                </a:solidFill>
+                <a:latin typeface="Calibri"/>
+              </a:rPr>
+              <a:t> + CLI </a:t>
+            </a:r>
+            <a:r>
+              <a:rPr sz="2000" b="0" dirty="0" err="1">
+                <a:solidFill>
+                  <a:srgbClr val="E8F0EC"/>
+                </a:solidFill>
+                <a:latin typeface="Calibri"/>
+              </a:rPr>
+              <a:t>canlı</a:t>
+            </a:r>
+            <a:r>
+              <a:rPr sz="2000" b="0" dirty="0">
+                <a:solidFill>
+                  <a:srgbClr val="E8F0EC"/>
+                </a:solidFill>
+                <a:latin typeface="Calibri"/>
+              </a:rPr>
+              <a:t> demo</a:t>
             </a:r>
           </a:p>
           <a:p>
@@ -7815,14 +8052,65 @@
               </a:spcAft>
             </a:pPr>
             <a:r>
-              <a:rPr sz="2000" b="0">
-                <a:solidFill>
-                  <a:srgbClr val="E8F0EC"/>
-                </a:solidFill>
-                <a:latin typeface="Calibri"/>
-              </a:rPr>
-              <a:t>•  7. Bonuslar, doğrulama ve özet</a:t>
-            </a:r>
+              <a:rPr sz="2000" b="0" dirty="0">
+                <a:solidFill>
+                  <a:srgbClr val="E8F0EC"/>
+                </a:solidFill>
+                <a:latin typeface="Calibri"/>
+              </a:rPr>
+              <a:t>•  7. </a:t>
+            </a:r>
+            <a:r>
+              <a:rPr sz="2000" b="0" dirty="0" err="1">
+                <a:solidFill>
+                  <a:srgbClr val="E8F0EC"/>
+                </a:solidFill>
+                <a:latin typeface="Calibri"/>
+              </a:rPr>
+              <a:t>Bonuslar</a:t>
+            </a:r>
+            <a:r>
+              <a:rPr lang="tr-TR" sz="2000" dirty="0">
+                <a:solidFill>
+                  <a:srgbClr val="E8F0EC"/>
+                </a:solidFill>
+                <a:latin typeface="Calibri"/>
+              </a:rPr>
+              <a:t> </a:t>
+            </a:r>
+            <a:r>
+              <a:rPr sz="2000" b="0" dirty="0" err="1">
+                <a:solidFill>
+                  <a:srgbClr val="E8F0EC"/>
+                </a:solidFill>
+                <a:latin typeface="Calibri"/>
+              </a:rPr>
+              <a:t>ve</a:t>
+            </a:r>
+            <a:r>
+              <a:rPr sz="2000" b="0" dirty="0">
+                <a:solidFill>
+                  <a:srgbClr val="E8F0EC"/>
+                </a:solidFill>
+                <a:latin typeface="Calibri"/>
+              </a:rPr>
+              <a:t> </a:t>
+            </a:r>
+            <a:r>
+              <a:rPr sz="2000" b="0" dirty="0" err="1">
+                <a:solidFill>
+                  <a:srgbClr val="E8F0EC"/>
+                </a:solidFill>
+                <a:latin typeface="Calibri"/>
+              </a:rPr>
+              <a:t>özet</a:t>
+            </a:r>
+            <a:endParaRPr sz="2000" b="0" dirty="0">
+              <a:solidFill>
+                <a:srgbClr val="E8F0EC"/>
+              </a:solidFill>
+              <a:latin typeface="Calibri"/>
+            </a:endParaRPr>
           </a:p>
         </p:txBody>
       </p:sp>
